--- a/05-AI应用基础48课时版/V2授课PPT/W20-第24次课-综合项目答辩（下）：优化.pptx
+++ b/05-AI应用基础48课时版/V2授课PPT/W20-第24次课-综合项目答辩（下）：优化.pptx
@@ -12,6 +12,8 @@
     <p:sldId id="320" r:id="rId72"/>
     <p:sldId id="368" r:id="rId15"/>
     <p:sldId id="369" r:id="rId16"/>
+    <p:sldId id="370" r:id="rId17"/>
+    <p:sldId id="371" r:id="rId18"/>
     <p:sldId id="367" r:id="rId14"/>
     <p:sldId id="366" r:id="rId118"/>
   </p:sldIdLst>
@@ -4241,6 +4243,2142 @@
 </p:sld>
 </file>
 
+<file path=ppt/slides/slide10.xml><?xml version="1.0" encoding="utf-8"?>
+<p:sld xmlns:a="http://schemas.openxmlformats.org/drawingml/2006/main" xmlns:p="http://schemas.openxmlformats.org/presentationml/2006/main" xmlns:r="http://schemas.openxmlformats.org/officeDocument/2006/relationships">
+  <p:cSld>
+    <p:spTree>
+      <p:nvGrpSpPr>
+        <p:cNvPr id="1" name=""/>
+        <p:cNvGrpSpPr/>
+        <p:nvPr/>
+      </p:nvGrpSpPr>
+      <p:grpSpPr/>
+      <p:sp>
+        <p:nvSpPr>
+          <p:cNvPr id="2" name="Rectangle 1"/>
+          <p:cNvSpPr/>
+          <p:nvPr/>
+        </p:nvSpPr>
+        <p:spPr>
+          <a:xfrm>
+            <a:off x="0" y="0"/>
+            <a:ext cx="12192000" cy="1150000"/>
+          </a:xfrm>
+          <a:prstGeom prst="rect">
+            <a:avLst/>
+          </a:prstGeom>
+          <a:solidFill>
+            <a:srgbClr val="010328"/>
+          </a:solidFill>
+          <a:ln>
+            <a:noFill/>
+          </a:ln>
+          <a:effectLst/>
+        </p:spPr>
+        <p:style>
+          <a:lnRef idx="1">
+            <a:schemeClr val="accent1"/>
+          </a:lnRef>
+          <a:fillRef idx="3">
+            <a:schemeClr val="accent1"/>
+          </a:fillRef>
+          <a:effectRef idx="2">
+            <a:schemeClr val="accent1"/>
+          </a:effectRef>
+          <a:fontRef idx="minor">
+            <a:schemeClr val="lt1"/>
+          </a:fontRef>
+        </p:style>
+        <p:txBody>
+          <a:bodyPr rtlCol="0" anchor="ctr"/>
+          <a:lstStyle/>
+          <a:p>
+            <a:pPr algn="ctr"/>
+          </a:p>
+        </p:txBody>
+      </p:sp>
+      <p:sp>
+        <p:nvSpPr>
+          <p:cNvPr id="3" name="Rectangle 2"/>
+          <p:cNvSpPr/>
+          <p:nvPr/>
+        </p:nvSpPr>
+        <p:spPr>
+          <a:xfrm>
+            <a:off x="0" y="1150000"/>
+            <a:ext cx="2600000" cy="70000"/>
+          </a:xfrm>
+          <a:prstGeom prst="rect">
+            <a:avLst/>
+          </a:prstGeom>
+          <a:solidFill>
+            <a:srgbClr val="F5670F"/>
+          </a:solidFill>
+          <a:ln>
+            <a:noFill/>
+          </a:ln>
+          <a:effectLst/>
+        </p:spPr>
+        <p:style>
+          <a:lnRef idx="1">
+            <a:schemeClr val="accent1"/>
+          </a:lnRef>
+          <a:fillRef idx="3">
+            <a:schemeClr val="accent1"/>
+          </a:fillRef>
+          <a:effectRef idx="2">
+            <a:schemeClr val="accent1"/>
+          </a:effectRef>
+          <a:fontRef idx="minor">
+            <a:schemeClr val="lt1"/>
+          </a:fontRef>
+        </p:style>
+        <p:txBody>
+          <a:bodyPr rtlCol="0" anchor="ctr"/>
+          <a:lstStyle/>
+          <a:p>
+            <a:pPr algn="ctr"/>
+          </a:p>
+        </p:txBody>
+      </p:sp>
+      <p:sp>
+        <p:nvSpPr>
+          <p:cNvPr id="4" name="TextBox 3"/>
+          <p:cNvSpPr txBox="1"/>
+          <p:nvPr/>
+        </p:nvSpPr>
+        <p:spPr>
+          <a:xfrm>
+            <a:off x="700000" y="300000"/>
+            <a:ext cx="10792000" cy="700000"/>
+          </a:xfrm>
+          <a:prstGeom prst="rect">
+            <a:avLst/>
+          </a:prstGeom>
+          <a:noFill/>
+        </p:spPr>
+        <p:txBody>
+          <a:bodyPr wrap="square" anchor="t">
+            <a:spAutoFit/>
+          </a:bodyPr>
+          <a:lstStyle/>
+          <a:p>
+            <a:pPr algn="l">
+              <a:lnSpc>
+                <a:spcPct val="110000"/>
+              </a:lnSpc>
+              <a:spcAft>
+                <a:spcPts val="600"/>
+              </a:spcAft>
+            </a:pPr>
+            <a:r>
+              <a:rPr sz="2400" b="1">
+                <a:solidFill>
+                  <a:srgbClr val="FFFFFF"/>
+                </a:solidFill>
+                <a:latin typeface="微软雅黑"/>
+              </a:rPr>
+              <a:t>实测验收 · z_defense</a:t>
+            </a:r>
+          </a:p>
+        </p:txBody>
+      </p:sp>
+      <p:sp>
+        <p:nvSpPr>
+          <p:cNvPr id="11" name="Rectangle 10"/>
+          <p:cNvSpPr/>
+          <p:nvPr/>
+        </p:nvSpPr>
+        <p:spPr>
+          <a:xfrm>
+            <a:off x="500000" y="6500000"/>
+            <a:ext cx="11100000" cy="20000"/>
+          </a:xfrm>
+          <a:prstGeom prst="rect">
+            <a:avLst/>
+          </a:prstGeom>
+          <a:solidFill>
+            <a:srgbClr val="C9D4EE"/>
+          </a:solidFill>
+          <a:ln>
+            <a:noFill/>
+          </a:ln>
+          <a:effectLst/>
+        </p:spPr>
+        <p:style>
+          <a:lnRef idx="1">
+            <a:schemeClr val="accent1"/>
+          </a:lnRef>
+          <a:fillRef idx="3">
+            <a:schemeClr val="accent1"/>
+          </a:fillRef>
+          <a:effectRef idx="2">
+            <a:schemeClr val="accent1"/>
+          </a:effectRef>
+          <a:fontRef idx="minor">
+            <a:schemeClr val="lt1"/>
+          </a:fontRef>
+        </p:style>
+        <p:txBody>
+          <a:bodyPr rtlCol="0" anchor="ctr"/>
+          <a:lstStyle/>
+          <a:p>
+            <a:pPr algn="ctr"/>
+          </a:p>
+        </p:txBody>
+      </p:sp>
+      <p:sp>
+        <p:nvSpPr>
+          <p:cNvPr id="12" name="TextBox 11"/>
+          <p:cNvSpPr txBox="1"/>
+          <p:nvPr/>
+        </p:nvSpPr>
+        <p:spPr>
+          <a:xfrm>
+            <a:off x="500000" y="6540000"/>
+            <a:ext cx="7000000" cy="300000"/>
+          </a:xfrm>
+          <a:prstGeom prst="rect">
+            <a:avLst/>
+          </a:prstGeom>
+          <a:noFill/>
+        </p:spPr>
+        <p:txBody>
+          <a:bodyPr wrap="square" anchor="t">
+            <a:spAutoFit/>
+          </a:bodyPr>
+          <a:lstStyle/>
+          <a:p>
+            <a:pPr algn="l">
+              <a:lnSpc>
+                <a:spcPct val="110000"/>
+              </a:lnSpc>
+              <a:spcAft>
+                <a:spcPts val="600"/>
+              </a:spcAft>
+            </a:pPr>
+            <a:r>
+              <a:rPr sz="1000" b="0">
+                <a:solidFill>
+                  <a:srgbClr val="8A97B5"/>
+                </a:solidFill>
+                <a:latin typeface="微软雅黑"/>
+              </a:rPr>
+              <a:t>两江智造集团 · AI应用基础48课时版</a:t>
+            </a:r>
+          </a:p>
+        </p:txBody>
+      </p:sp>
+      <p:sp>
+        <p:nvSpPr>
+          <p:cNvPr id="13" name="TextBox 12"/>
+          <p:cNvSpPr txBox="1"/>
+          <p:nvPr/>
+        </p:nvSpPr>
+        <p:spPr>
+          <a:xfrm>
+            <a:off x="10600000" y="6540000"/>
+            <a:ext cx="1000000" cy="300000"/>
+          </a:xfrm>
+          <a:prstGeom prst="rect">
+            <a:avLst/>
+          </a:prstGeom>
+          <a:noFill/>
+        </p:spPr>
+        <p:txBody>
+          <a:bodyPr wrap="square" anchor="t">
+            <a:spAutoFit/>
+          </a:bodyPr>
+          <a:lstStyle/>
+          <a:p>
+            <a:pPr algn="r">
+              <a:lnSpc>
+                <a:spcPct val="110000"/>
+              </a:lnSpc>
+              <a:spcAft>
+                <a:spcPts val="600"/>
+              </a:spcAft>
+            </a:pPr>
+            <a:r>
+              <a:rPr sz="1000" b="0">
+                <a:solidFill>
+                  <a:srgbClr val="8A97B5"/>
+                </a:solidFill>
+                <a:latin typeface="微软雅黑"/>
+              </a:rPr>
+              <a:t>8 / 11</a:t>
+            </a:r>
+          </a:p>
+        </p:txBody>
+      </p:sp>
+      <p:sp>
+        <p:nvSpPr>
+          <p:cNvPr id="14" name="Rectangle 13"/>
+          <p:cNvSpPr/>
+          <p:nvPr/>
+        </p:nvSpPr>
+        <p:spPr>
+          <a:xfrm>
+            <a:off x="0" y="1371600"/>
+            <a:ext cx="12188952" cy="713232"/>
+          </a:xfrm>
+          <a:prstGeom prst="rect">
+            <a:avLst/>
+          </a:prstGeom>
+          <a:solidFill>
+            <a:srgbClr val="F2F5F9"/>
+          </a:solidFill>
+          <a:ln>
+            <a:noFill/>
+          </a:ln>
+          <a:effectLst/>
+        </p:spPr>
+        <p:style>
+          <a:lnRef idx="1">
+            <a:schemeClr val="accent1"/>
+          </a:lnRef>
+          <a:fillRef idx="3">
+            <a:schemeClr val="accent1"/>
+          </a:fillRef>
+          <a:effectRef idx="2">
+            <a:schemeClr val="accent1"/>
+          </a:effectRef>
+          <a:fontRef idx="minor">
+            <a:schemeClr val="lt1"/>
+          </a:fontRef>
+        </p:style>
+        <p:txBody>
+          <a:bodyPr rtlCol="0" anchor="ctr" wrap="square"/>
+          <a:lstStyle/>
+          <a:p>
+            <a:pPr algn="ctr"/>
+          </a:p>
+        </p:txBody>
+      </p:sp>
+      <p:sp>
+        <p:nvSpPr>
+          <p:cNvPr id="15" name="TextBox 14"/>
+          <p:cNvSpPr txBox="1"/>
+          <p:nvPr/>
+        </p:nvSpPr>
+        <p:spPr>
+          <a:xfrm>
+            <a:off x="457200" y="1426464"/>
+            <a:ext cx="2651760" cy="566928"/>
+          </a:xfrm>
+          <a:prstGeom prst="rect">
+            <a:avLst/>
+          </a:prstGeom>
+          <a:noFill/>
+        </p:spPr>
+        <p:txBody>
+          <a:bodyPr wrap="square">
+            <a:spAutoFit/>
+          </a:bodyPr>
+          <a:lstStyle/>
+          <a:p>
+            <a:r>
+              <a:rPr sz="1400" b="1">
+                <a:solidFill>
+                  <a:srgbClr val="2E7D46"/>
+                </a:solidFill>
+                <a:latin typeface="微软雅黑"/>
+              </a:rPr>
+              <a:t>实测达成档位</a:t>
+            </a:r>
+          </a:p>
+          <a:p>
+            <a:r>
+              <a:rPr sz="1400" b="1">
+                <a:solidFill>
+                  <a:srgbClr val="2E7D46"/>
+                </a:solidFill>
+                <a:latin typeface="微软雅黑"/>
+              </a:rPr>
+              <a:t>优(A)</a:t>
+            </a:r>
+          </a:p>
+        </p:txBody>
+      </p:sp>
+      <p:sp>
+        <p:nvSpPr>
+          <p:cNvPr id="16" name="Rectangle 15"/>
+          <p:cNvSpPr/>
+          <p:nvPr/>
+        </p:nvSpPr>
+        <p:spPr>
+          <a:xfrm>
+            <a:off x="3200400" y="1426464"/>
+            <a:ext cx="1627632" cy="603504"/>
+          </a:xfrm>
+          <a:prstGeom prst="rect">
+            <a:avLst/>
+          </a:prstGeom>
+          <a:solidFill>
+            <a:srgbClr val="FFFFFF"/>
+          </a:solidFill>
+          <a:ln>
+            <a:solidFill>
+              <a:srgbClr val="D6DCE4"/>
+            </a:solidFill>
+          </a:ln>
+          <a:effectLst/>
+        </p:spPr>
+        <p:style>
+          <a:lnRef idx="1">
+            <a:schemeClr val="accent1"/>
+          </a:lnRef>
+          <a:fillRef idx="3">
+            <a:schemeClr val="accent1"/>
+          </a:fillRef>
+          <a:effectRef idx="2">
+            <a:schemeClr val="accent1"/>
+          </a:effectRef>
+          <a:fontRef idx="minor">
+            <a:schemeClr val="lt1"/>
+          </a:fontRef>
+        </p:style>
+        <p:txBody>
+          <a:bodyPr rtlCol="0" anchor="ctr" wrap="square"/>
+          <a:lstStyle/>
+          <a:p>
+            <a:pPr algn="ctr"/>
+          </a:p>
+        </p:txBody>
+      </p:sp>
+      <p:sp>
+        <p:nvSpPr>
+          <p:cNvPr id="17" name="TextBox 16"/>
+          <p:cNvSpPr txBox="1"/>
+          <p:nvPr/>
+        </p:nvSpPr>
+        <p:spPr>
+          <a:xfrm>
+            <a:off x="3246120" y="1463040"/>
+            <a:ext cx="1536192" cy="548640"/>
+          </a:xfrm>
+          <a:prstGeom prst="rect">
+            <a:avLst/>
+          </a:prstGeom>
+          <a:noFill/>
+        </p:spPr>
+        <p:txBody>
+          <a:bodyPr wrap="square">
+            <a:spAutoFit/>
+          </a:bodyPr>
+          <a:lstStyle/>
+          <a:p>
+            <a:r>
+              <a:rPr sz="900" b="0">
+                <a:solidFill>
+                  <a:srgbClr val="35506E"/>
+                </a:solidFill>
+                <a:latin typeface="微软雅黑"/>
+              </a:rPr>
+              <a:t>3 项须人工答辩现场确认（见下行清单）</a:t>
+            </a:r>
+          </a:p>
+        </p:txBody>
+      </p:sp>
+      <p:sp>
+        <p:nvSpPr>
+          <p:cNvPr id="18" name="Rectangle 17"/>
+          <p:cNvSpPr/>
+          <p:nvPr/>
+        </p:nvSpPr>
+        <p:spPr>
+          <a:xfrm>
+            <a:off x="4901184" y="1426464"/>
+            <a:ext cx="1627632" cy="603504"/>
+          </a:xfrm>
+          <a:prstGeom prst="rect">
+            <a:avLst/>
+          </a:prstGeom>
+          <a:solidFill>
+            <a:srgbClr val="FFFFFF"/>
+          </a:solidFill>
+          <a:ln>
+            <a:solidFill>
+              <a:srgbClr val="D6DCE4"/>
+            </a:solidFill>
+          </a:ln>
+          <a:effectLst/>
+        </p:spPr>
+        <p:style>
+          <a:lnRef idx="1">
+            <a:schemeClr val="accent1"/>
+          </a:lnRef>
+          <a:fillRef idx="3">
+            <a:schemeClr val="accent1"/>
+          </a:fillRef>
+          <a:effectRef idx="2">
+            <a:schemeClr val="accent1"/>
+          </a:effectRef>
+          <a:fontRef idx="minor">
+            <a:schemeClr val="lt1"/>
+          </a:fontRef>
+        </p:style>
+        <p:txBody>
+          <a:bodyPr rtlCol="0" anchor="ctr" wrap="square"/>
+          <a:lstStyle/>
+          <a:p>
+            <a:pPr algn="ctr"/>
+          </a:p>
+        </p:txBody>
+      </p:sp>
+      <p:sp>
+        <p:nvSpPr>
+          <p:cNvPr id="19" name="TextBox 18"/>
+          <p:cNvSpPr txBox="1"/>
+          <p:nvPr/>
+        </p:nvSpPr>
+        <p:spPr>
+          <a:xfrm>
+            <a:off x="4946904" y="1463040"/>
+            <a:ext cx="1536192" cy="548640"/>
+          </a:xfrm>
+          <a:prstGeom prst="rect">
+            <a:avLst/>
+          </a:prstGeom>
+          <a:noFill/>
+        </p:spPr>
+        <p:txBody>
+          <a:bodyPr wrap="square">
+            <a:spAutoFit/>
+          </a:bodyPr>
+          <a:lstStyle/>
+          <a:p>
+            <a:r>
+              <a:rPr sz="900" b="0">
+                <a:solidFill>
+                  <a:srgbClr val="35506E"/>
+                </a:solidFill>
+                <a:latin typeface="微软雅黑"/>
+              </a:rPr>
+              <a:t>证据链实测 5/5 层就绪</a:t>
+            </a:r>
+          </a:p>
+        </p:txBody>
+      </p:sp>
+      <p:sp>
+        <p:nvSpPr>
+          <p:cNvPr id="20" name="Rectangle 19"/>
+          <p:cNvSpPr/>
+          <p:nvPr/>
+        </p:nvSpPr>
+        <p:spPr>
+          <a:xfrm>
+            <a:off x="6601968" y="1426464"/>
+            <a:ext cx="1627632" cy="603504"/>
+          </a:xfrm>
+          <a:prstGeom prst="rect">
+            <a:avLst/>
+          </a:prstGeom>
+          <a:solidFill>
+            <a:srgbClr val="FFFFFF"/>
+          </a:solidFill>
+          <a:ln>
+            <a:solidFill>
+              <a:srgbClr val="D6DCE4"/>
+            </a:solidFill>
+          </a:ln>
+          <a:effectLst/>
+        </p:spPr>
+        <p:style>
+          <a:lnRef idx="1">
+            <a:schemeClr val="accent1"/>
+          </a:lnRef>
+          <a:fillRef idx="3">
+            <a:schemeClr val="accent1"/>
+          </a:fillRef>
+          <a:effectRef idx="2">
+            <a:schemeClr val="accent1"/>
+          </a:effectRef>
+          <a:fontRef idx="minor">
+            <a:schemeClr val="lt1"/>
+          </a:fontRef>
+        </p:style>
+        <p:txBody>
+          <a:bodyPr rtlCol="0" anchor="ctr" wrap="square"/>
+          <a:lstStyle/>
+          <a:p>
+            <a:pPr algn="ctr"/>
+          </a:p>
+        </p:txBody>
+      </p:sp>
+      <p:sp>
+        <p:nvSpPr>
+          <p:cNvPr id="21" name="TextBox 20"/>
+          <p:cNvSpPr txBox="1"/>
+          <p:nvPr/>
+        </p:nvSpPr>
+        <p:spPr>
+          <a:xfrm>
+            <a:off x="6647688" y="1463040"/>
+            <a:ext cx="1536192" cy="548640"/>
+          </a:xfrm>
+          <a:prstGeom prst="rect">
+            <a:avLst/>
+          </a:prstGeom>
+          <a:noFill/>
+        </p:spPr>
+        <p:txBody>
+          <a:bodyPr wrap="square">
+            <a:spAutoFit/>
+          </a:bodyPr>
+          <a:lstStyle/>
+          <a:p>
+            <a:r>
+              <a:rPr sz="900" b="0">
+                <a:solidFill>
+                  <a:srgbClr val="35506E"/>
+                </a:solidFill>
+                <a:latin typeface="微软雅黑"/>
+              </a:rPr>
+              <a:t>基本问题实测命中 3/3</a:t>
+            </a:r>
+          </a:p>
+        </p:txBody>
+      </p:sp>
+      <p:sp>
+        <p:nvSpPr>
+          <p:cNvPr id="22" name="Rectangle 21"/>
+          <p:cNvSpPr/>
+          <p:nvPr/>
+        </p:nvSpPr>
+        <p:spPr>
+          <a:xfrm>
+            <a:off x="8302752" y="1426464"/>
+            <a:ext cx="1627632" cy="603504"/>
+          </a:xfrm>
+          <a:prstGeom prst="rect">
+            <a:avLst/>
+          </a:prstGeom>
+          <a:solidFill>
+            <a:srgbClr val="FFFFFF"/>
+          </a:solidFill>
+          <a:ln>
+            <a:solidFill>
+              <a:srgbClr val="D6DCE4"/>
+            </a:solidFill>
+          </a:ln>
+          <a:effectLst/>
+        </p:spPr>
+        <p:style>
+          <a:lnRef idx="1">
+            <a:schemeClr val="accent1"/>
+          </a:lnRef>
+          <a:fillRef idx="3">
+            <a:schemeClr val="accent1"/>
+          </a:fillRef>
+          <a:effectRef idx="2">
+            <a:schemeClr val="accent1"/>
+          </a:effectRef>
+          <a:fontRef idx="minor">
+            <a:schemeClr val="lt1"/>
+          </a:fontRef>
+        </p:style>
+        <p:txBody>
+          <a:bodyPr rtlCol="0" anchor="ctr" wrap="square"/>
+          <a:lstStyle/>
+          <a:p>
+            <a:pPr algn="ctr"/>
+          </a:p>
+        </p:txBody>
+      </p:sp>
+      <p:sp>
+        <p:nvSpPr>
+          <p:cNvPr id="23" name="TextBox 22"/>
+          <p:cNvSpPr txBox="1"/>
+          <p:nvPr/>
+        </p:nvSpPr>
+        <p:spPr>
+          <a:xfrm>
+            <a:off x="8348472" y="1463040"/>
+            <a:ext cx="1536192" cy="548640"/>
+          </a:xfrm>
+          <a:prstGeom prst="rect">
+            <a:avLst/>
+          </a:prstGeom>
+          <a:noFill/>
+        </p:spPr>
+        <p:txBody>
+          <a:bodyPr wrap="square">
+            <a:spAutoFit/>
+          </a:bodyPr>
+          <a:lstStyle/>
+          <a:p>
+            <a:r>
+              <a:rPr sz="900" b="0">
+                <a:solidFill>
+                  <a:srgbClr val="35506E"/>
+                </a:solidFill>
+                <a:latin typeface="微软雅黑"/>
+              </a:rPr>
+              <a:t>决策记录完整=是</a:t>
+            </a:r>
+          </a:p>
+        </p:txBody>
+      </p:sp>
+      <p:sp>
+        <p:nvSpPr>
+          <p:cNvPr id="24" name="Rectangle 23"/>
+          <p:cNvSpPr/>
+          <p:nvPr/>
+        </p:nvSpPr>
+        <p:spPr>
+          <a:xfrm>
+            <a:off x="10003536" y="1426464"/>
+            <a:ext cx="1627632" cy="603504"/>
+          </a:xfrm>
+          <a:prstGeom prst="rect">
+            <a:avLst/>
+          </a:prstGeom>
+          <a:solidFill>
+            <a:srgbClr val="FFFFFF"/>
+          </a:solidFill>
+          <a:ln>
+            <a:solidFill>
+              <a:srgbClr val="D6DCE4"/>
+            </a:solidFill>
+          </a:ln>
+          <a:effectLst/>
+        </p:spPr>
+        <p:style>
+          <a:lnRef idx="1">
+            <a:schemeClr val="accent1"/>
+          </a:lnRef>
+          <a:fillRef idx="3">
+            <a:schemeClr val="accent1"/>
+          </a:fillRef>
+          <a:effectRef idx="2">
+            <a:schemeClr val="accent1"/>
+          </a:effectRef>
+          <a:fontRef idx="minor">
+            <a:schemeClr val="lt1"/>
+          </a:fontRef>
+        </p:style>
+        <p:txBody>
+          <a:bodyPr rtlCol="0" anchor="ctr" wrap="square"/>
+          <a:lstStyle/>
+          <a:p>
+            <a:pPr algn="ctr"/>
+          </a:p>
+        </p:txBody>
+      </p:sp>
+      <p:sp>
+        <p:nvSpPr>
+          <p:cNvPr id="25" name="TextBox 24"/>
+          <p:cNvSpPr txBox="1"/>
+          <p:nvPr/>
+        </p:nvSpPr>
+        <p:spPr>
+          <a:xfrm>
+            <a:off x="10049256" y="1463040"/>
+            <a:ext cx="1536192" cy="548640"/>
+          </a:xfrm>
+          <a:prstGeom prst="rect">
+            <a:avLst/>
+          </a:prstGeom>
+          <a:noFill/>
+        </p:spPr>
+        <p:txBody>
+          <a:bodyPr wrap="square">
+            <a:spAutoFit/>
+          </a:bodyPr>
+          <a:lstStyle/>
+          <a:p>
+            <a:r>
+              <a:rPr sz="900" b="0">
+                <a:solidFill>
+                  <a:srgbClr val="35506E"/>
+                </a:solidFill>
+                <a:latin typeface="微软雅黑"/>
+              </a:rPr>
+              <a:t>本地 HTTP 部署演示实测=跑通（端口/状态码/字节数见部署演示节）</a:t>
+            </a:r>
+          </a:p>
+        </p:txBody>
+      </p:sp>
+      <p:graphicFrame>
+        <p:nvGraphicFramePr>
+          <p:cNvPr id="26" name="Table 25"/>
+          <p:cNvGraphicFramePr>
+            <a:graphicFrameLocks noGrp="1"/>
+          </p:cNvGraphicFramePr>
+          <p:nvPr/>
+        </p:nvGraphicFramePr>
+        <p:xfrm>
+          <a:off x="457200" y="2212848"/>
+          <a:ext cx="11274552" cy="2834640"/>
+        </p:xfrm>
+        <a:graphic>
+          <a:graphicData uri="http://schemas.openxmlformats.org/drawingml/2006/table">
+            <a:tbl>
+              <a:tblPr firstRow="1" bandRow="1">
+                <a:tableStyleId>{5C22544A-7EE6-4342-B048-85BDC9FD1C3A}</a:tableStyleId>
+              </a:tblPr>
+              <a:tblGrid>
+                <a:gridCol w="1188720"/>
+                <a:gridCol w="5120640"/>
+                <a:gridCol w="3886200"/>
+                <a:gridCol w="1078992"/>
+              </a:tblGrid>
+              <a:tr h="566928">
+                <a:tc>
+                  <a:txBody>
+                    <a:bodyPr/>
+                    <a:lstStyle/>
+                    <a:p>
+                      <a:r>
+                        <a:rPr sz="1050" b="1">
+                          <a:solidFill>
+                            <a:srgbClr val="FFFFFF"/>
+                          </a:solidFill>
+                          <a:latin typeface="微软雅黑"/>
+                        </a:rPr>
+                        <a:t>档位</a:t>
+                      </a:r>
+                    </a:p>
+                  </a:txBody>
+                  <a:tcPr>
+                    <a:solidFill>
+                      <a:srgbClr val="010328"/>
+                    </a:solidFill>
+                  </a:tcPr>
+                </a:tc>
+                <a:tc>
+                  <a:txBody>
+                    <a:bodyPr/>
+                    <a:lstStyle/>
+                    <a:p>
+                      <a:r>
+                        <a:rPr sz="1050" b="1">
+                          <a:solidFill>
+                            <a:srgbClr val="FFFFFF"/>
+                          </a:solidFill>
+                          <a:latin typeface="微软雅黑"/>
+                        </a:rPr>
+                        <a:t>工单验收标准（原文）</a:t>
+                      </a:r>
+                    </a:p>
+                  </a:txBody>
+                  <a:tcPr>
+                    <a:solidFill>
+                      <a:srgbClr val="010328"/>
+                    </a:solidFill>
+                  </a:tcPr>
+                </a:tc>
+                <a:tc>
+                  <a:txBody>
+                    <a:bodyPr/>
+                    <a:lstStyle/>
+                    <a:p>
+                      <a:r>
+                        <a:rPr sz="1050" b="1">
+                          <a:solidFill>
+                            <a:srgbClr val="FFFFFF"/>
+                          </a:solidFill>
+                          <a:latin typeface="微软雅黑"/>
+                        </a:rPr>
+                        <a:t>本次实测判定</a:t>
+                      </a:r>
+                    </a:p>
+                  </a:txBody>
+                  <a:tcPr>
+                    <a:solidFill>
+                      <a:srgbClr val="010328"/>
+                    </a:solidFill>
+                  </a:tcPr>
+                </a:tc>
+                <a:tc>
+                  <a:txBody>
+                    <a:bodyPr/>
+                    <a:lstStyle/>
+                    <a:p>
+                      <a:r>
+                        <a:rPr sz="1050" b="1">
+                          <a:solidFill>
+                            <a:srgbClr val="FFFFFF"/>
+                          </a:solidFill>
+                          <a:latin typeface="微软雅黑"/>
+                        </a:rPr>
+                        <a:t>判定</a:t>
+                      </a:r>
+                    </a:p>
+                  </a:txBody>
+                  <a:tcPr>
+                    <a:solidFill>
+                      <a:srgbClr val="010328"/>
+                    </a:solidFill>
+                  </a:tcPr>
+                </a:tc>
+              </a:tr>
+              <a:tr h="566928">
+                <a:tc>
+                  <a:txBody>
+                    <a:bodyPr/>
+                    <a:lstStyle/>
+                    <a:p>
+                      <a:r>
+                        <a:rPr sz="1000" b="1">
+                          <a:solidFill>
+                            <a:srgbClr val="2B2F36"/>
+                          </a:solidFill>
+                          <a:latin typeface="微软雅黑"/>
+                        </a:rPr>
+                        <a:t>及格(D)</a:t>
+                      </a:r>
+                    </a:p>
+                  </a:txBody>
+                  <a:tcPr>
+                    <a:solidFill>
+                      <a:srgbClr val="FFFFFF"/>
+                    </a:solidFill>
+                  </a:tcPr>
+                </a:tc>
+                <a:tc>
+                  <a:txBody>
+                    <a:bodyPr/>
+                    <a:lstStyle/>
+                    <a:p>
+                      <a:r>
+                        <a:rPr sz="950" b="0">
+                          <a:solidFill>
+                            <a:srgbClr val="2B2F36"/>
+                          </a:solidFill>
+                          <a:latin typeface="微软雅黑"/>
+                        </a:rPr>
+                        <a:t>预答辩评委放行；代码规范率≥70%</a:t>
+                      </a:r>
+                    </a:p>
+                  </a:txBody>
+                  <a:tcPr>
+                    <a:solidFill>
+                      <a:srgbClr val="FFFFFF"/>
+                    </a:solidFill>
+                  </a:tcPr>
+                </a:tc>
+                <a:tc>
+                  <a:txBody>
+                    <a:bodyPr/>
+                    <a:lstStyle/>
+                    <a:p>
+                      <a:r>
+                        <a:rPr sz="950" b="0">
+                          <a:solidFill>
+                            <a:srgbClr val="2B2F36"/>
+                          </a:solidFill>
+                          <a:latin typeface="微软雅黑"/>
+                        </a:rPr>
+                        <a:t>规范率门槛≥70% [达标] ｜ 功能机器OK ｜ 人工待确认（预答辩评委放行（企业导师+组内互评 2/3 票，人工答辩确认））</a:t>
+                      </a:r>
+                    </a:p>
+                  </a:txBody>
+                  <a:tcPr>
+                    <a:solidFill>
+                      <a:srgbClr val="FFFFFF"/>
+                    </a:solidFill>
+                  </a:tcPr>
+                </a:tc>
+                <a:tc>
+                  <a:txBody>
+                    <a:bodyPr/>
+                    <a:lstStyle/>
+                    <a:p>
+                      <a:r>
+                        <a:rPr sz="1000" b="1">
+                          <a:solidFill>
+                            <a:srgbClr val="2E7D46"/>
+                          </a:solidFill>
+                          <a:latin typeface="微软雅黑"/>
+                        </a:rPr>
+                        <a:t>✓ 达标</a:t>
+                      </a:r>
+                    </a:p>
+                  </a:txBody>
+                  <a:tcPr>
+                    <a:solidFill>
+                      <a:srgbClr val="FFFFFF"/>
+                    </a:solidFill>
+                  </a:tcPr>
+                </a:tc>
+              </a:tr>
+              <a:tr h="566928">
+                <a:tc>
+                  <a:txBody>
+                    <a:bodyPr/>
+                    <a:lstStyle/>
+                    <a:p>
+                      <a:r>
+                        <a:rPr sz="1000" b="1">
+                          <a:solidFill>
+                            <a:srgbClr val="2B2F36"/>
+                          </a:solidFill>
+                          <a:latin typeface="微软雅黑"/>
+                        </a:rPr>
+                        <a:t>良好(C)</a:t>
+                      </a:r>
+                    </a:p>
+                  </a:txBody>
+                  <a:tcPr>
+                    <a:solidFill>
+                      <a:srgbClr val="F7F9FB"/>
+                    </a:solidFill>
+                  </a:tcPr>
+                </a:tc>
+                <a:tc>
+                  <a:txBody>
+                    <a:bodyPr/>
+                    <a:lstStyle/>
+                    <a:p>
+                      <a:r>
+                        <a:rPr sz="950" b="0">
+                          <a:solidFill>
+                            <a:srgbClr val="2B2F36"/>
+                          </a:solidFill>
+                          <a:latin typeface="微软雅黑"/>
+                        </a:rPr>
+                        <a:t>链路完整基本问题全答</a:t>
+                      </a:r>
+                    </a:p>
+                  </a:txBody>
+                  <a:tcPr>
+                    <a:solidFill>
+                      <a:srgbClr val="F7F9FB"/>
+                    </a:solidFill>
+                  </a:tcPr>
+                </a:tc>
+                <a:tc>
+                  <a:txBody>
+                    <a:bodyPr/>
+                    <a:lstStyle/>
+                    <a:p>
+                      <a:r>
+                        <a:rPr sz="950" b="0">
+                          <a:solidFill>
+                            <a:srgbClr val="2B2F36"/>
+                          </a:solidFill>
+                          <a:latin typeface="微软雅黑"/>
+                        </a:rPr>
+                        <a:t>功能OK</a:t>
+                      </a:r>
+                    </a:p>
+                  </a:txBody>
+                  <a:tcPr>
+                    <a:solidFill>
+                      <a:srgbClr val="F7F9FB"/>
+                    </a:solidFill>
+                  </a:tcPr>
+                </a:tc>
+                <a:tc>
+                  <a:txBody>
+                    <a:bodyPr/>
+                    <a:lstStyle/>
+                    <a:p>
+                      <a:r>
+                        <a:rPr sz="1000" b="1">
+                          <a:solidFill>
+                            <a:srgbClr val="2E7D46"/>
+                          </a:solidFill>
+                          <a:latin typeface="微软雅黑"/>
+                        </a:rPr>
+                        <a:t>✓ 达标</a:t>
+                      </a:r>
+                    </a:p>
+                  </a:txBody>
+                  <a:tcPr>
+                    <a:solidFill>
+                      <a:srgbClr val="F7F9FB"/>
+                    </a:solidFill>
+                  </a:tcPr>
+                </a:tc>
+              </a:tr>
+              <a:tr h="566928">
+                <a:tc>
+                  <a:txBody>
+                    <a:bodyPr/>
+                    <a:lstStyle/>
+                    <a:p>
+                      <a:r>
+                        <a:rPr sz="1000" b="1">
+                          <a:solidFill>
+                            <a:srgbClr val="2B2F36"/>
+                          </a:solidFill>
+                          <a:latin typeface="微软雅黑"/>
+                        </a:rPr>
+                        <a:t>优秀(B)</a:t>
+                      </a:r>
+                    </a:p>
+                  </a:txBody>
+                  <a:tcPr>
+                    <a:solidFill>
+                      <a:srgbClr val="FFFFFF"/>
+                    </a:solidFill>
+                  </a:tcPr>
+                </a:tc>
+                <a:tc>
+                  <a:txBody>
+                    <a:bodyPr/>
+                    <a:lstStyle/>
+                    <a:p>
+                      <a:r>
+                        <a:rPr sz="950" b="0">
+                          <a:solidFill>
+                            <a:srgbClr val="2B2F36"/>
+                          </a:solidFill>
+                          <a:latin typeface="微软雅黑"/>
+                        </a:rPr>
+                        <a:t>评委评分≥85；决策记录完整</a:t>
+                      </a:r>
+                    </a:p>
+                  </a:txBody>
+                  <a:tcPr>
+                    <a:solidFill>
+                      <a:srgbClr val="FFFFFF"/>
+                    </a:solidFill>
+                  </a:tcPr>
+                </a:tc>
+                <a:tc>
+                  <a:txBody>
+                    <a:bodyPr/>
+                    <a:lstStyle/>
+                    <a:p>
+                      <a:r>
+                        <a:rPr sz="950" b="0">
+                          <a:solidFill>
+                            <a:srgbClr val="2B2F36"/>
+                          </a:solidFill>
+                          <a:latin typeface="微软雅黑"/>
+                        </a:rPr>
+                        <a:t>功能机器OK ｜ 人工待确认（评委评分≥85（答辩当天人工打分））</a:t>
+                      </a:r>
+                    </a:p>
+                  </a:txBody>
+                  <a:tcPr>
+                    <a:solidFill>
+                      <a:srgbClr val="FFFFFF"/>
+                    </a:solidFill>
+                  </a:tcPr>
+                </a:tc>
+                <a:tc>
+                  <a:txBody>
+                    <a:bodyPr/>
+                    <a:lstStyle/>
+                    <a:p>
+                      <a:r>
+                        <a:rPr sz="1000" b="1">
+                          <a:solidFill>
+                            <a:srgbClr val="2E7D46"/>
+                          </a:solidFill>
+                          <a:latin typeface="微软雅黑"/>
+                        </a:rPr>
+                        <a:t>✓ 达标</a:t>
+                      </a:r>
+                    </a:p>
+                  </a:txBody>
+                  <a:tcPr>
+                    <a:solidFill>
+                      <a:srgbClr val="FFFFFF"/>
+                    </a:solidFill>
+                  </a:tcPr>
+                </a:tc>
+              </a:tr>
+              <a:tr h="566928">
+                <a:tc>
+                  <a:txBody>
+                    <a:bodyPr/>
+                    <a:lstStyle/>
+                    <a:p>
+                      <a:r>
+                        <a:rPr sz="1000" b="1">
+                          <a:solidFill>
+                            <a:srgbClr val="2B2F36"/>
+                          </a:solidFill>
+                          <a:latin typeface="微软雅黑"/>
+                        </a:rPr>
+                        <a:t>优(A)</a:t>
+                      </a:r>
+                    </a:p>
+                  </a:txBody>
+                  <a:tcPr>
+                    <a:solidFill>
+                      <a:srgbClr val="F7F9FB"/>
+                    </a:solidFill>
+                  </a:tcPr>
+                </a:tc>
+                <a:tc>
+                  <a:txBody>
+                    <a:bodyPr/>
+                    <a:lstStyle/>
+                    <a:p>
+                      <a:r>
+                        <a:rPr sz="950" b="0">
+                          <a:solidFill>
+                            <a:srgbClr val="2B2F36"/>
+                          </a:solidFill>
+                          <a:latin typeface="微软雅黑"/>
+                        </a:rPr>
+                        <a:t>创新亮点加部署演示</a:t>
+                      </a:r>
+                    </a:p>
+                  </a:txBody>
+                  <a:tcPr>
+                    <a:solidFill>
+                      <a:srgbClr val="F7F9FB"/>
+                    </a:solidFill>
+                  </a:tcPr>
+                </a:tc>
+                <a:tc>
+                  <a:txBody>
+                    <a:bodyPr/>
+                    <a:lstStyle/>
+                    <a:p>
+                      <a:r>
+                        <a:rPr sz="950" b="0">
+                          <a:solidFill>
+                            <a:srgbClr val="2B2F36"/>
+                          </a:solidFill>
+                          <a:latin typeface="微软雅黑"/>
+                        </a:rPr>
+                        <a:t>功能机器OK ｜ 人工待确认（创新亮点（答辩评委判定））</a:t>
+                      </a:r>
+                    </a:p>
+                  </a:txBody>
+                  <a:tcPr>
+                    <a:solidFill>
+                      <a:srgbClr val="F7F9FB"/>
+                    </a:solidFill>
+                  </a:tcPr>
+                </a:tc>
+                <a:tc>
+                  <a:txBody>
+                    <a:bodyPr/>
+                    <a:lstStyle/>
+                    <a:p>
+                      <a:r>
+                        <a:rPr sz="1000" b="1">
+                          <a:solidFill>
+                            <a:srgbClr val="2E7D46"/>
+                          </a:solidFill>
+                          <a:latin typeface="微软雅黑"/>
+                        </a:rPr>
+                        <a:t>✓ 达标</a:t>
+                      </a:r>
+                    </a:p>
+                  </a:txBody>
+                  <a:tcPr>
+                    <a:solidFill>
+                      <a:srgbClr val="F7F9FB"/>
+                    </a:solidFill>
+                  </a:tcPr>
+                </a:tc>
+              </a:tr>
+            </a:tbl>
+          </a:graphicData>
+        </a:graphic>
+      </p:graphicFrame>
+      <p:sp>
+        <p:nvSpPr>
+          <p:cNvPr id="27" name="Rectangle 26"/>
+          <p:cNvSpPr/>
+          <p:nvPr/>
+        </p:nvSpPr>
+        <p:spPr>
+          <a:xfrm>
+            <a:off x="457200" y="5138928"/>
+            <a:ext cx="11274552" cy="1261872"/>
+          </a:xfrm>
+          <a:prstGeom prst="rect">
+            <a:avLst/>
+          </a:prstGeom>
+          <a:solidFill>
+            <a:srgbClr val="FFF7E8"/>
+          </a:solidFill>
+          <a:ln>
+            <a:solidFill>
+              <a:srgbClr val="E8C88A"/>
+            </a:solidFill>
+          </a:ln>
+          <a:effectLst/>
+        </p:spPr>
+        <p:style>
+          <a:lnRef idx="1">
+            <a:schemeClr val="accent1"/>
+          </a:lnRef>
+          <a:fillRef idx="3">
+            <a:schemeClr val="accent1"/>
+          </a:fillRef>
+          <a:effectRef idx="2">
+            <a:schemeClr val="accent1"/>
+          </a:effectRef>
+          <a:fontRef idx="minor">
+            <a:schemeClr val="lt1"/>
+          </a:fontRef>
+        </p:style>
+        <p:txBody>
+          <a:bodyPr rtlCol="0" anchor="ctr" wrap="square"/>
+          <a:lstStyle/>
+          <a:p>
+            <a:pPr algn="ctr"/>
+          </a:p>
+        </p:txBody>
+      </p:sp>
+      <p:sp>
+        <p:nvSpPr>
+          <p:cNvPr id="28" name="TextBox 27"/>
+          <p:cNvSpPr txBox="1"/>
+          <p:nvPr/>
+        </p:nvSpPr>
+        <p:spPr>
+          <a:xfrm>
+            <a:off x="621792" y="5212080"/>
+            <a:ext cx="10927080" cy="1133856"/>
+          </a:xfrm>
+          <a:prstGeom prst="rect">
+            <a:avLst/>
+          </a:prstGeom>
+          <a:noFill/>
+        </p:spPr>
+        <p:txBody>
+          <a:bodyPr wrap="square">
+            <a:spAutoFit/>
+          </a:bodyPr>
+          <a:lstStyle/>
+          <a:p>
+            <a:r>
+              <a:rPr sz="950" b="0">
+                <a:solidFill>
+                  <a:srgbClr val="6B4E16"/>
+                </a:solidFill>
+                <a:latin typeface="微软雅黑"/>
+              </a:rPr>
+              <a:t>人工答辩项 3 条（代码不代判，答辩现场确认，逐条见下页 report.txt 截图）</a:t>
+            </a:r>
+          </a:p>
+          <a:p>
+            <a:r>
+              <a:rPr sz="950" b="0">
+                <a:solidFill>
+                  <a:srgbClr val="6B4E16"/>
+                </a:solidFill>
+                <a:latin typeface="微软雅黑"/>
+              </a:rPr>
+              <a:t>档位是算出来的：判定值由 run.py 本次真跑产生；工单未给数字的门槛在报告里标注为「兜底口径·非工单数字」。</a:t>
+            </a:r>
+          </a:p>
+          <a:p>
+            <a:r>
+              <a:rPr sz="950" b="0">
+                <a:solidFill>
+                  <a:srgbClr val="6B4E16"/>
+                </a:solidFill>
+                <a:latin typeface="微软雅黑"/>
+              </a:rPr>
+              <a:t>实测值共 6 项，本页只列前 5 项，其余见下页 report.txt 截图。</a:t>
+            </a:r>
+          </a:p>
+        </p:txBody>
+      </p:sp>
+    </p:spTree>
+  </p:cSld>
+  <p:clrMapOvr>
+    <a:masterClrMapping/>
+  </p:clrMapOvr>
+</p:sld>
+</file>
+
+<file path=ppt/slides/slide11.xml><?xml version="1.0" encoding="utf-8"?>
+<p:sld xmlns:a="http://schemas.openxmlformats.org/drawingml/2006/main" xmlns:p="http://schemas.openxmlformats.org/presentationml/2006/main" xmlns:r="http://schemas.openxmlformats.org/officeDocument/2006/relationships">
+  <p:cSld>
+    <p:spTree>
+      <p:nvGrpSpPr>
+        <p:cNvPr id="1" name=""/>
+        <p:cNvGrpSpPr/>
+        <p:nvPr/>
+      </p:nvGrpSpPr>
+      <p:grpSpPr/>
+      <p:sp>
+        <p:nvSpPr>
+          <p:cNvPr id="2" name="Rectangle 1"/>
+          <p:cNvSpPr/>
+          <p:nvPr/>
+        </p:nvSpPr>
+        <p:spPr>
+          <a:xfrm>
+            <a:off x="0" y="0"/>
+            <a:ext cx="12192000" cy="1150000"/>
+          </a:xfrm>
+          <a:prstGeom prst="rect">
+            <a:avLst/>
+          </a:prstGeom>
+          <a:solidFill>
+            <a:srgbClr val="010328"/>
+          </a:solidFill>
+          <a:ln>
+            <a:noFill/>
+          </a:ln>
+          <a:effectLst/>
+        </p:spPr>
+        <p:style>
+          <a:lnRef idx="1">
+            <a:schemeClr val="accent1"/>
+          </a:lnRef>
+          <a:fillRef idx="3">
+            <a:schemeClr val="accent1"/>
+          </a:fillRef>
+          <a:effectRef idx="2">
+            <a:schemeClr val="accent1"/>
+          </a:effectRef>
+          <a:fontRef idx="minor">
+            <a:schemeClr val="lt1"/>
+          </a:fontRef>
+        </p:style>
+        <p:txBody>
+          <a:bodyPr rtlCol="0" anchor="ctr"/>
+          <a:lstStyle/>
+          <a:p>
+            <a:pPr algn="ctr"/>
+          </a:p>
+        </p:txBody>
+      </p:sp>
+      <p:sp>
+        <p:nvSpPr>
+          <p:cNvPr id="3" name="Rectangle 2"/>
+          <p:cNvSpPr/>
+          <p:nvPr/>
+        </p:nvSpPr>
+        <p:spPr>
+          <a:xfrm>
+            <a:off x="0" y="1150000"/>
+            <a:ext cx="2600000" cy="70000"/>
+          </a:xfrm>
+          <a:prstGeom prst="rect">
+            <a:avLst/>
+          </a:prstGeom>
+          <a:solidFill>
+            <a:srgbClr val="F5670F"/>
+          </a:solidFill>
+          <a:ln>
+            <a:noFill/>
+          </a:ln>
+          <a:effectLst/>
+        </p:spPr>
+        <p:style>
+          <a:lnRef idx="1">
+            <a:schemeClr val="accent1"/>
+          </a:lnRef>
+          <a:fillRef idx="3">
+            <a:schemeClr val="accent1"/>
+          </a:fillRef>
+          <a:effectRef idx="2">
+            <a:schemeClr val="accent1"/>
+          </a:effectRef>
+          <a:fontRef idx="minor">
+            <a:schemeClr val="lt1"/>
+          </a:fontRef>
+        </p:style>
+        <p:txBody>
+          <a:bodyPr rtlCol="0" anchor="ctr"/>
+          <a:lstStyle/>
+          <a:p>
+            <a:pPr algn="ctr"/>
+          </a:p>
+        </p:txBody>
+      </p:sp>
+      <p:sp>
+        <p:nvSpPr>
+          <p:cNvPr id="4" name="TextBox 3"/>
+          <p:cNvSpPr txBox="1"/>
+          <p:nvPr/>
+        </p:nvSpPr>
+        <p:spPr>
+          <a:xfrm>
+            <a:off x="700000" y="300000"/>
+            <a:ext cx="10792000" cy="700000"/>
+          </a:xfrm>
+          <a:prstGeom prst="rect">
+            <a:avLst/>
+          </a:prstGeom>
+          <a:noFill/>
+        </p:spPr>
+        <p:txBody>
+          <a:bodyPr wrap="square" anchor="t">
+            <a:spAutoFit/>
+          </a:bodyPr>
+          <a:lstStyle/>
+          <a:p>
+            <a:pPr algn="l">
+              <a:lnSpc>
+                <a:spcPct val="110000"/>
+              </a:lnSpc>
+              <a:spcAft>
+                <a:spcPts val="600"/>
+              </a:spcAft>
+            </a:pPr>
+            <a:r>
+              <a:rPr sz="2400" b="1">
+                <a:solidFill>
+                  <a:srgbClr val="FFFFFF"/>
+                </a:solidFill>
+                <a:latin typeface="微软雅黑"/>
+              </a:rPr>
+              <a:t>实跑截图证据 · z_defense</a:t>
+            </a:r>
+          </a:p>
+        </p:txBody>
+      </p:sp>
+      <p:sp>
+        <p:nvSpPr>
+          <p:cNvPr id="11" name="Rectangle 10"/>
+          <p:cNvSpPr/>
+          <p:nvPr/>
+        </p:nvSpPr>
+        <p:spPr>
+          <a:xfrm>
+            <a:off x="500000" y="6500000"/>
+            <a:ext cx="11100000" cy="20000"/>
+          </a:xfrm>
+          <a:prstGeom prst="rect">
+            <a:avLst/>
+          </a:prstGeom>
+          <a:solidFill>
+            <a:srgbClr val="C9D4EE"/>
+          </a:solidFill>
+          <a:ln>
+            <a:noFill/>
+          </a:ln>
+          <a:effectLst/>
+        </p:spPr>
+        <p:style>
+          <a:lnRef idx="1">
+            <a:schemeClr val="accent1"/>
+          </a:lnRef>
+          <a:fillRef idx="3">
+            <a:schemeClr val="accent1"/>
+          </a:fillRef>
+          <a:effectRef idx="2">
+            <a:schemeClr val="accent1"/>
+          </a:effectRef>
+          <a:fontRef idx="minor">
+            <a:schemeClr val="lt1"/>
+          </a:fontRef>
+        </p:style>
+        <p:txBody>
+          <a:bodyPr rtlCol="0" anchor="ctr"/>
+          <a:lstStyle/>
+          <a:p>
+            <a:pPr algn="ctr"/>
+          </a:p>
+        </p:txBody>
+      </p:sp>
+      <p:sp>
+        <p:nvSpPr>
+          <p:cNvPr id="12" name="TextBox 11"/>
+          <p:cNvSpPr txBox="1"/>
+          <p:nvPr/>
+        </p:nvSpPr>
+        <p:spPr>
+          <a:xfrm>
+            <a:off x="500000" y="6540000"/>
+            <a:ext cx="7000000" cy="300000"/>
+          </a:xfrm>
+          <a:prstGeom prst="rect">
+            <a:avLst/>
+          </a:prstGeom>
+          <a:noFill/>
+        </p:spPr>
+        <p:txBody>
+          <a:bodyPr wrap="square" anchor="t">
+            <a:spAutoFit/>
+          </a:bodyPr>
+          <a:lstStyle/>
+          <a:p>
+            <a:pPr algn="l">
+              <a:lnSpc>
+                <a:spcPct val="110000"/>
+              </a:lnSpc>
+              <a:spcAft>
+                <a:spcPts val="600"/>
+              </a:spcAft>
+            </a:pPr>
+            <a:r>
+              <a:rPr sz="1000" b="0">
+                <a:solidFill>
+                  <a:srgbClr val="8A97B5"/>
+                </a:solidFill>
+                <a:latin typeface="微软雅黑"/>
+              </a:rPr>
+              <a:t>两江智造集团 · AI应用基础48课时版</a:t>
+            </a:r>
+          </a:p>
+        </p:txBody>
+      </p:sp>
+      <p:sp>
+        <p:nvSpPr>
+          <p:cNvPr id="13" name="TextBox 12"/>
+          <p:cNvSpPr txBox="1"/>
+          <p:nvPr/>
+        </p:nvSpPr>
+        <p:spPr>
+          <a:xfrm>
+            <a:off x="10600000" y="6540000"/>
+            <a:ext cx="1000000" cy="300000"/>
+          </a:xfrm>
+          <a:prstGeom prst="rect">
+            <a:avLst/>
+          </a:prstGeom>
+          <a:noFill/>
+        </p:spPr>
+        <p:txBody>
+          <a:bodyPr wrap="square" anchor="t">
+            <a:spAutoFit/>
+          </a:bodyPr>
+          <a:lstStyle/>
+          <a:p>
+            <a:pPr algn="r">
+              <a:lnSpc>
+                <a:spcPct val="110000"/>
+              </a:lnSpc>
+              <a:spcAft>
+                <a:spcPts val="600"/>
+              </a:spcAft>
+            </a:pPr>
+            <a:r>
+              <a:rPr sz="1000" b="0">
+                <a:solidFill>
+                  <a:srgbClr val="8A97B5"/>
+                </a:solidFill>
+                <a:latin typeface="微软雅黑"/>
+              </a:rPr>
+              <a:t>9 / 11</a:t>
+            </a:r>
+          </a:p>
+        </p:txBody>
+      </p:sp>
+      <p:sp>
+        <p:nvSpPr>
+          <p:cNvPr id="14" name="Rectangle 13"/>
+          <p:cNvSpPr/>
+          <p:nvPr/>
+        </p:nvSpPr>
+        <p:spPr>
+          <a:xfrm>
+            <a:off x="457200" y="1481328"/>
+            <a:ext cx="5486400" cy="2304288"/>
+          </a:xfrm>
+          <a:prstGeom prst="rect">
+            <a:avLst/>
+          </a:prstGeom>
+          <a:solidFill>
+            <a:srgbClr val="FFFFFF"/>
+          </a:solidFill>
+          <a:ln>
+            <a:solidFill>
+              <a:srgbClr val="D6DCE4"/>
+            </a:solidFill>
+          </a:ln>
+          <a:effectLst/>
+        </p:spPr>
+        <p:style>
+          <a:lnRef idx="1">
+            <a:schemeClr val="accent1"/>
+          </a:lnRef>
+          <a:fillRef idx="3">
+            <a:schemeClr val="accent1"/>
+          </a:fillRef>
+          <a:effectRef idx="2">
+            <a:schemeClr val="accent1"/>
+          </a:effectRef>
+          <a:fontRef idx="minor">
+            <a:schemeClr val="lt1"/>
+          </a:fontRef>
+        </p:style>
+        <p:txBody>
+          <a:bodyPr rtlCol="0" anchor="ctr" wrap="square"/>
+          <a:lstStyle/>
+          <a:p>
+            <a:pPr algn="ctr"/>
+          </a:p>
+        </p:txBody>
+      </p:sp>
+      <p:sp>
+        <p:nvSpPr>
+          <p:cNvPr id="15" name="TextBox 14"/>
+          <p:cNvSpPr txBox="1"/>
+          <p:nvPr/>
+        </p:nvSpPr>
+        <p:spPr>
+          <a:xfrm>
+            <a:off x="530352" y="1517904"/>
+            <a:ext cx="5340096" cy="237744"/>
+          </a:xfrm>
+          <a:prstGeom prst="rect">
+            <a:avLst/>
+          </a:prstGeom>
+          <a:noFill/>
+        </p:spPr>
+        <p:txBody>
+          <a:bodyPr wrap="square">
+            <a:spAutoFit/>
+          </a:bodyPr>
+          <a:lstStyle/>
+          <a:p>
+            <a:r>
+              <a:rPr sz="950" b="1">
+                <a:solidFill>
+                  <a:srgbClr val="010328"/>
+                </a:solidFill>
+                <a:latin typeface="微软雅黑"/>
+              </a:rPr>
+              <a:t>① run.py 实跑终端输出（逐字捕获）</a:t>
+            </a:r>
+          </a:p>
+        </p:txBody>
+      </p:sp>
+      <p:pic>
+        <p:nvPicPr>
+          <p:cNvPr id="16" name="Picture 15" descr="shot_run.png"/>
+          <p:cNvPicPr>
+            <a:picLocks noChangeAspect="1"/>
+          </p:cNvPicPr>
+          <p:nvPr/>
+        </p:nvPicPr>
+        <p:blipFill>
+          <a:blip r:embed="rId2"/>
+          <a:stretch>
+            <a:fillRect/>
+          </a:stretch>
+        </p:blipFill>
+        <p:spPr>
+          <a:xfrm>
+            <a:off x="964038" y="1773936"/>
+            <a:ext cx="4472722" cy="1956816"/>
+          </a:xfrm>
+          <a:prstGeom prst="rect">
+            <a:avLst/>
+          </a:prstGeom>
+        </p:spPr>
+      </p:pic>
+      <p:sp>
+        <p:nvSpPr>
+          <p:cNvPr id="17" name="Rectangle 16"/>
+          <p:cNvSpPr/>
+          <p:nvPr/>
+        </p:nvSpPr>
+        <p:spPr>
+          <a:xfrm>
+            <a:off x="6327648" y="1481328"/>
+            <a:ext cx="5486400" cy="2304288"/>
+          </a:xfrm>
+          <a:prstGeom prst="rect">
+            <a:avLst/>
+          </a:prstGeom>
+          <a:solidFill>
+            <a:srgbClr val="FFFFFF"/>
+          </a:solidFill>
+          <a:ln>
+            <a:solidFill>
+              <a:srgbClr val="D6DCE4"/>
+            </a:solidFill>
+          </a:ln>
+          <a:effectLst/>
+        </p:spPr>
+        <p:style>
+          <a:lnRef idx="1">
+            <a:schemeClr val="accent1"/>
+          </a:lnRef>
+          <a:fillRef idx="3">
+            <a:schemeClr val="accent1"/>
+          </a:fillRef>
+          <a:effectRef idx="2">
+            <a:schemeClr val="accent1"/>
+          </a:effectRef>
+          <a:fontRef idx="minor">
+            <a:schemeClr val="lt1"/>
+          </a:fontRef>
+        </p:style>
+        <p:txBody>
+          <a:bodyPr rtlCol="0" anchor="ctr" wrap="square"/>
+          <a:lstStyle/>
+          <a:p>
+            <a:pPr algn="ctr"/>
+          </a:p>
+        </p:txBody>
+      </p:sp>
+      <p:sp>
+        <p:nvSpPr>
+          <p:cNvPr id="18" name="TextBox 17"/>
+          <p:cNvSpPr txBox="1"/>
+          <p:nvPr/>
+        </p:nvSpPr>
+        <p:spPr>
+          <a:xfrm>
+            <a:off x="6400800" y="1517904"/>
+            <a:ext cx="5340096" cy="237744"/>
+          </a:xfrm>
+          <a:prstGeom prst="rect">
+            <a:avLst/>
+          </a:prstGeom>
+          <a:noFill/>
+        </p:spPr>
+        <p:txBody>
+          <a:bodyPr wrap="square">
+            <a:spAutoFit/>
+          </a:bodyPr>
+          <a:lstStyle/>
+          <a:p>
+            <a:r>
+              <a:rPr sz="950" b="1">
+                <a:solidFill>
+                  <a:srgbClr val="010328"/>
+                </a:solidFill>
+                <a:latin typeface="微软雅黑"/>
+              </a:rPr>
+              <a:t>② pytest 全绿终端输出（逐字捕获）</a:t>
+            </a:r>
+          </a:p>
+        </p:txBody>
+      </p:sp>
+      <p:pic>
+        <p:nvPicPr>
+          <p:cNvPr id="19" name="Picture 18" descr="shot_test.png"/>
+          <p:cNvPicPr>
+            <a:picLocks noChangeAspect="1"/>
+          </p:cNvPicPr>
+          <p:nvPr/>
+        </p:nvPicPr>
+        <p:blipFill>
+          <a:blip r:embed="rId3"/>
+          <a:stretch>
+            <a:fillRect/>
+          </a:stretch>
+        </p:blipFill>
+        <p:spPr>
+          <a:xfrm>
+            <a:off x="6834486" y="1773936"/>
+            <a:ext cx="4472722" cy="1956816"/>
+          </a:xfrm>
+          <a:prstGeom prst="rect">
+            <a:avLst/>
+          </a:prstGeom>
+        </p:spPr>
+      </p:pic>
+      <p:sp>
+        <p:nvSpPr>
+          <p:cNvPr id="20" name="Rectangle 19"/>
+          <p:cNvSpPr/>
+          <p:nvPr/>
+        </p:nvSpPr>
+        <p:spPr>
+          <a:xfrm>
+            <a:off x="457200" y="3877056"/>
+            <a:ext cx="5486400" cy="2304288"/>
+          </a:xfrm>
+          <a:prstGeom prst="rect">
+            <a:avLst/>
+          </a:prstGeom>
+          <a:solidFill>
+            <a:srgbClr val="FFFFFF"/>
+          </a:solidFill>
+          <a:ln>
+            <a:solidFill>
+              <a:srgbClr val="D6DCE4"/>
+            </a:solidFill>
+          </a:ln>
+          <a:effectLst/>
+        </p:spPr>
+        <p:style>
+          <a:lnRef idx="1">
+            <a:schemeClr val="accent1"/>
+          </a:lnRef>
+          <a:fillRef idx="3">
+            <a:schemeClr val="accent1"/>
+          </a:fillRef>
+          <a:effectRef idx="2">
+            <a:schemeClr val="accent1"/>
+          </a:effectRef>
+          <a:fontRef idx="minor">
+            <a:schemeClr val="lt1"/>
+          </a:fontRef>
+        </p:style>
+        <p:txBody>
+          <a:bodyPr rtlCol="0" anchor="ctr" wrap="square"/>
+          <a:lstStyle/>
+          <a:p>
+            <a:pPr algn="ctr"/>
+          </a:p>
+        </p:txBody>
+      </p:sp>
+      <p:sp>
+        <p:nvSpPr>
+          <p:cNvPr id="21" name="TextBox 20"/>
+          <p:cNvSpPr txBox="1"/>
+          <p:nvPr/>
+        </p:nvSpPr>
+        <p:spPr>
+          <a:xfrm>
+            <a:off x="530352" y="3913632"/>
+            <a:ext cx="5340096" cy="237744"/>
+          </a:xfrm>
+          <a:prstGeom prst="rect">
+            <a:avLst/>
+          </a:prstGeom>
+          <a:noFill/>
+        </p:spPr>
+        <p:txBody>
+          <a:bodyPr wrap="square">
+            <a:spAutoFit/>
+          </a:bodyPr>
+          <a:lstStyle/>
+          <a:p>
+            <a:r>
+              <a:rPr sz="950" b="1">
+                <a:solidFill>
+                  <a:srgbClr val="010328"/>
+                </a:solidFill>
+                <a:latin typeface="微软雅黑"/>
+              </a:rPr>
+              <a:t>③ report.txt「验收档位判定（实测）」段</a:t>
+            </a:r>
+          </a:p>
+        </p:txBody>
+      </p:sp>
+      <p:pic>
+        <p:nvPicPr>
+          <p:cNvPr id="22" name="Picture 21" descr="shot_report.png"/>
+          <p:cNvPicPr>
+            <a:picLocks noChangeAspect="1"/>
+          </p:cNvPicPr>
+          <p:nvPr/>
+        </p:nvPicPr>
+        <p:blipFill>
+          <a:blip r:embed="rId4"/>
+          <a:stretch>
+            <a:fillRect/>
+          </a:stretch>
+        </p:blipFill>
+        <p:spPr>
+          <a:xfrm>
+            <a:off x="964038" y="4169664"/>
+            <a:ext cx="4472722" cy="1956816"/>
+          </a:xfrm>
+          <a:prstGeom prst="rect">
+            <a:avLst/>
+          </a:prstGeom>
+        </p:spPr>
+      </p:pic>
+      <p:sp>
+        <p:nvSpPr>
+          <p:cNvPr id="23" name="Rectangle 22"/>
+          <p:cNvSpPr/>
+          <p:nvPr/>
+        </p:nvSpPr>
+        <p:spPr>
+          <a:xfrm>
+            <a:off x="6327648" y="3877056"/>
+            <a:ext cx="5486400" cy="2304288"/>
+          </a:xfrm>
+          <a:prstGeom prst="rect">
+            <a:avLst/>
+          </a:prstGeom>
+          <a:solidFill>
+            <a:srgbClr val="F7F9FB"/>
+          </a:solidFill>
+          <a:ln>
+            <a:solidFill>
+              <a:srgbClr val="D6DCE4"/>
+            </a:solidFill>
+          </a:ln>
+          <a:effectLst/>
+        </p:spPr>
+        <p:style>
+          <a:lnRef idx="1">
+            <a:schemeClr val="accent1"/>
+          </a:lnRef>
+          <a:fillRef idx="3">
+            <a:schemeClr val="accent1"/>
+          </a:fillRef>
+          <a:effectRef idx="2">
+            <a:schemeClr val="accent1"/>
+          </a:effectRef>
+          <a:fontRef idx="minor">
+            <a:schemeClr val="lt1"/>
+          </a:fontRef>
+        </p:style>
+        <p:txBody>
+          <a:bodyPr rtlCol="0" anchor="ctr" wrap="square"/>
+          <a:lstStyle/>
+          <a:p>
+            <a:pPr algn="ctr"/>
+          </a:p>
+        </p:txBody>
+      </p:sp>
+      <p:sp>
+        <p:nvSpPr>
+          <p:cNvPr id="24" name="TextBox 23"/>
+          <p:cNvSpPr txBox="1"/>
+          <p:nvPr/>
+        </p:nvSpPr>
+        <p:spPr>
+          <a:xfrm>
+            <a:off x="6400800" y="3913632"/>
+            <a:ext cx="5340096" cy="237744"/>
+          </a:xfrm>
+          <a:prstGeom prst="rect">
+            <a:avLst/>
+          </a:prstGeom>
+          <a:noFill/>
+        </p:spPr>
+        <p:txBody>
+          <a:bodyPr wrap="square">
+            <a:spAutoFit/>
+          </a:bodyPr>
+          <a:lstStyle/>
+          <a:p>
+            <a:r>
+              <a:rPr sz="950" b="1">
+                <a:solidFill>
+                  <a:srgbClr val="010328"/>
+                </a:solidFill>
+                <a:latin typeface="微软雅黑"/>
+              </a:rPr>
+              <a:t>④ 采集口径（可复现）</a:t>
+            </a:r>
+          </a:p>
+        </p:txBody>
+      </p:sp>
+      <p:sp>
+        <p:nvSpPr>
+          <p:cNvPr id="25" name="TextBox 24"/>
+          <p:cNvSpPr txBox="1"/>
+          <p:nvPr/>
+        </p:nvSpPr>
+        <p:spPr>
+          <a:xfrm>
+            <a:off x="6437376" y="4187952"/>
+            <a:ext cx="5266944" cy="1920240"/>
+          </a:xfrm>
+          <a:prstGeom prst="rect">
+            <a:avLst/>
+          </a:prstGeom>
+          <a:noFill/>
+        </p:spPr>
+        <p:txBody>
+          <a:bodyPr wrap="square">
+            <a:spAutoFit/>
+          </a:bodyPr>
+          <a:lstStyle/>
+          <a:p>
+            <a:r>
+              <a:rPr sz="950" b="0">
+                <a:solidFill>
+                  <a:srgbClr val="2B2F36"/>
+                </a:solidFill>
+                <a:latin typeface="微软雅黑"/>
+              </a:rPr>
+              <a:t>项目：05-AI应用基础48课时版/工程化项目/z_defense/</a:t>
+            </a:r>
+          </a:p>
+          <a:p>
+            <a:r>
+              <a:rPr sz="950" b="0">
+                <a:solidFill>
+                  <a:srgbClr val="2B2F36"/>
+                </a:solidFill>
+                <a:latin typeface="微软雅黑"/>
+              </a:rPr>
+              <a:t>命令：/opt/anaconda3/bin/python run.py ｜ /opt/anaconda3/bin/python -m pytest -q</a:t>
+            </a:r>
+          </a:p>
+          <a:p>
+            <a:r>
+              <a:rPr sz="950" b="0">
+                <a:solidFill>
+                  <a:srgbClr val="2B2F36"/>
+                </a:solidFill>
+                <a:latin typeface="微软雅黑"/>
+              </a:rPr>
+              <a:t>采集：工具/ppt97/capture97.py（2026-10-28 10:49 真跑逐字捕获输出）</a:t>
+            </a:r>
+          </a:p>
+          <a:p>
+            <a:r>
+              <a:rPr sz="950" b="0">
+                <a:solidFill>
+                  <a:srgbClr val="2B2F36"/>
+                </a:solidFill>
+                <a:latin typeface="微软雅黑"/>
+              </a:rPr>
+              <a:t>渲染：工具/ppt97/terminal_png.py（终端截图，不改写任何数字）</a:t>
+            </a:r>
+          </a:p>
+          <a:p>
+            <a:r>
+              <a:rPr sz="950" b="0">
+                <a:solidFill>
+                  <a:srgbClr val="2B2F36"/>
+                </a:solidFill>
+                <a:latin typeface="微软雅黑"/>
+              </a:rPr>
+              <a:t>退出码：run=0 ｜ pytest=0</a:t>
+            </a:r>
+          </a:p>
+          <a:p>
+            <a:r>
+              <a:rPr sz="950" b="0">
+                <a:solidFill>
+                  <a:srgbClr val="2B2F36"/>
+                </a:solidFill>
+                <a:latin typeface="微软雅黑"/>
+              </a:rPr>
+              <a:t>档位判定取自 output/report.txt「验收档位判定（实测）」段</a:t>
+            </a:r>
+          </a:p>
+        </p:txBody>
+      </p:sp>
+      <p:sp>
+        <p:nvSpPr>
+          <p:cNvPr id="26" name="TextBox 25"/>
+          <p:cNvSpPr txBox="1"/>
+          <p:nvPr/>
+        </p:nvSpPr>
+        <p:spPr>
+          <a:xfrm>
+            <a:off x="457200" y="6254496"/>
+            <a:ext cx="11247120" cy="201168"/>
+          </a:xfrm>
+          <a:prstGeom prst="rect">
+            <a:avLst/>
+          </a:prstGeom>
+          <a:noFill/>
+        </p:spPr>
+        <p:txBody>
+          <a:bodyPr wrap="square">
+            <a:spAutoFit/>
+          </a:bodyPr>
+          <a:lstStyle/>
+          <a:p>
+            <a:r>
+              <a:rPr sz="900" b="0">
+                <a:solidFill>
+                  <a:srgbClr val="7A8698"/>
+                </a:solidFill>
+                <a:latin typeface="微软雅黑"/>
+              </a:rPr>
+              <a:t>截图内容逐字取自 工具/ppt97/evidence/z_defense/（capture97.py 真跑捕获，未改写数字）</a:t>
+            </a:r>
+          </a:p>
+        </p:txBody>
+      </p:sp>
+    </p:spTree>
+  </p:cSld>
+  <p:clrMapOvr>
+    <a:masterClrMapping/>
+  </p:clrMapOvr>
+</p:sld>
+</file>
+
 <file path=ppt/slides/slide2.xml><?xml version="1.0" encoding="utf-8"?>
 <p:sld xmlns:a="http://schemas.openxmlformats.org/drawingml/2006/main" xmlns:p="http://schemas.openxmlformats.org/presentationml/2006/main" xmlns:r="http://schemas.openxmlformats.org/officeDocument/2006/relationships">
   <p:cSld>
@@ -4714,7 +6852,7 @@
                 </a:solidFill>
                 <a:latin typeface="微软雅黑"/>
               </a:rPr>
-              <a:t>2 / 9</a:t>
+              <a:t>2 / 11</a:t>
             </a:r>
           </a:p>
         </p:txBody>
@@ -5188,7 +7326,7 @@
                 </a:solidFill>
                 <a:latin typeface="微软雅黑"/>
               </a:rPr>
-              <a:t>3 / 9</a:t>
+              <a:t>3 / 11</a:t>
             </a:r>
           </a:p>
         </p:txBody>
@@ -5980,7 +8118,7 @@
                 </a:solidFill>
                 <a:latin typeface="微软雅黑"/>
               </a:rPr>
-              <a:t>4 / 9</a:t>
+              <a:t>4 / 11</a:t>
             </a:r>
           </a:p>
         </p:txBody>
@@ -6651,7 +8789,7 @@
                 </a:solidFill>
                 <a:latin typeface="微软雅黑"/>
               </a:rPr>
-              <a:t>5 / 9</a:t>
+              <a:t>5 / 11</a:t>
             </a:r>
           </a:p>
         </p:txBody>
@@ -6927,7 +9065,7 @@
                 </a:solidFill>
                 <a:latin typeface="微软雅黑"/>
               </a:rPr>
-              <a:t>6 / 9</a:t>
+              <a:t>6 / 11</a:t>
             </a:r>
           </a:p>
         </p:txBody>
@@ -7099,142 +9237,87 @@
                   <a:srgbClr val="0545E8"/>
                 </a:solidFill>
               </a:rPr>
-              <a:t>① 参考实现真实运行输出（本工单完成态）</a:t>
-            </a:r>
-          </a:p>
-          <a:p>
-            <a:pPr algn="l">
-              <a:spcBef>
-                <a:spcPts val="100"/>
-              </a:spcBef>
-            </a:pPr>
-            <a:r>
-              <a:rPr sz="1000" b="0">
-                <a:solidFill>
-                  <a:srgbClr val="010328"/>
-                </a:solidFill>
-              </a:rPr>
-              <a:t>=== 工单 Z 综合项目答辩 · 完成态 ===</a:t>
-            </a:r>
-          </a:p>
-          <a:p>
-            <a:pPr algn="l">
-              <a:spcBef>
-                <a:spcPts val="100"/>
-              </a:spcBef>
-            </a:pPr>
-            <a:r>
-              <a:rPr sz="1000" b="0">
-                <a:solidFill>
-                  <a:srgbClr val="010328"/>
-                </a:solidFill>
-              </a:rPr>
-              <a:t>=== 答辩提纲（一图贯通 · 自动生成） ===</a:t>
-            </a:r>
-          </a:p>
-          <a:p>
-            <a:pPr algn="l">
-              <a:spcBef>
-                <a:spcPts val="100"/>
-              </a:spcBef>
-            </a:pPr>
-            <a:r>
-              <a:rPr sz="1000" b="0">
-                <a:solidFill>
-                  <a:srgbClr val="010328"/>
-                </a:solidFill>
-              </a:rPr>
-              <a:t>  1. 数据层 [OK] —— 脏数据→可信数据集：清洗规则与质量分</a:t>
-            </a:r>
-          </a:p>
-          <a:p>
-            <a:pPr algn="l">
-              <a:spcBef>
-                <a:spcPts val="100"/>
-              </a:spcBef>
-            </a:pPr>
-            <a:r>
-              <a:rPr sz="1000" b="0">
-                <a:solidFill>
-                  <a:srgbClr val="010328"/>
-                </a:solidFill>
-              </a:rPr>
-              <a:t>  2. 特征层 [OK] —— 特征字典：时域/频域双解与重要性证据</a:t>
-            </a:r>
-          </a:p>
-          <a:p>
-            <a:pPr algn="l">
-              <a:spcBef>
-                <a:spcPts val="100"/>
-              </a:spcBef>
-            </a:pPr>
-            <a:r>
-              <a:rPr sz="1000" b="0">
-                <a:solidFill>
-                  <a:srgbClr val="010328"/>
-                </a:solidFill>
-              </a:rPr>
-              <a:t>  3. 模型层 [OK] —— 双模型对比与混淆矩阵里的漏报账</a:t>
-            </a:r>
-          </a:p>
-          <a:p>
-            <a:pPr algn="l">
-              <a:spcBef>
-                <a:spcPts val="100"/>
-              </a:spcBef>
-            </a:pPr>
-            <a:r>
-              <a:rPr sz="1000" b="0">
-                <a:solidFill>
-                  <a:srgbClr val="010328"/>
-                </a:solidFill>
-              </a:rPr>
-              <a:t>  4. 服务层 [OK] —— 三版Prompt对比：LLM回答质量+50%</a:t>
-            </a:r>
-          </a:p>
-          <a:p>
-            <a:pPr algn="l">
-              <a:spcBef>
-                <a:spcPts val="100"/>
-              </a:spcBef>
-            </a:pPr>
-            <a:r>
-              <a:rPr sz="1000" b="0">
-                <a:solidFill>
-                  <a:srgbClr val="010328"/>
-                </a:solidFill>
-              </a:rPr>
-              <a:t>  5. 智能体层 [OK] —— 调度策略：随机→安全优先，协调正确率+77%</a:t>
-            </a:r>
-          </a:p>
-          <a:p>
-            <a:pPr algn="l">
-              <a:spcBef>
-                <a:spcPts val="100"/>
-              </a:spcBef>
-            </a:pPr>
-            <a:r>
-              <a:rPr sz="1000" b="0">
-                <a:solidFill>
-                  <a:srgbClr val="010328"/>
-                </a:solidFill>
-              </a:rPr>
-              <a:t>证据链 5/5 层就绪</a:t>
-            </a:r>
-          </a:p>
-          <a:p>
-            <a:pPr algn="l">
-              <a:spcBef>
-                <a:spcPts val="100"/>
-              </a:spcBef>
-            </a:pPr>
-            <a:r>
-              <a:rPr sz="1000" b="0">
-                <a:solidFill>
-                  <a:srgbClr val="010328"/>
-                </a:solidFill>
-              </a:rPr>
-              <a:t>结论: 档案袋五层齐备即可上台——'作品集即简历'。</a:t>
+              <a:t>① 本次真跑实测输出（逐字取自 output/report.txt）</a:t>
+            </a:r>
+          </a:p>
+          <a:p>
+            <a:r>
+              <a:rPr sz="1400" b="1">
+                <a:solidFill>
+                  <a:srgbClr val="0545E8"/>
+                </a:solidFill>
+              </a:rPr>
+              <a:t>实测达成档位（仅机器可判部分，未经答辩确认不得据此宣称）: 优(A) ｜ 3 项须人工答辩现场确认（见下行清单）｜ 证据链实测 5/5 层就绪 ｜ 基本问题实测命中 3/3 ｜ 决策记录完整=是 ｜ 本地 HTTP 部署演示实测=跑通（端口/状态码/字节数见部署演示节） ｜ 代码规范率实测 97.5%</a:t>
+            </a:r>
+          </a:p>
+          <a:p>
+            <a:r>
+              <a:rPr sz="1400" b="1">
+                <a:solidFill>
+                  <a:srgbClr val="0545E8"/>
+                </a:solidFill>
+              </a:rPr>
+              <a:t>及格(D)    规范率门槛≥70% [达标] ｜ 功能机器OK｜人工待确认（预答辩评委放行（企业导师+组内互评 2/3 票，人工答辩确认）） ｜ 预答辩评委放行；代码规范率≥70%</a:t>
+            </a:r>
+          </a:p>
+          <a:p>
+            <a:r>
+              <a:rPr sz="1400" b="1">
+                <a:solidFill>
+                  <a:srgbClr val="0545E8"/>
+                </a:solidFill>
+              </a:rPr>
+              <a:t>良好(C)    功能OK ｜ 链路完整基本问题全答</a:t>
+            </a:r>
+          </a:p>
+          <a:p>
+            <a:r>
+              <a:rPr sz="1400" b="1">
+                <a:solidFill>
+                  <a:srgbClr val="0545E8"/>
+                </a:solidFill>
+              </a:rPr>
+              <a:t>优秀(B)    功能机器OK｜人工待确认（评委评分≥85（答辩当天人工打分）） ｜ 评委评分≥85；决策记录完整</a:t>
+            </a:r>
+          </a:p>
+          <a:p>
+            <a:r>
+              <a:rPr sz="1400" b="1">
+                <a:solidFill>
+                  <a:srgbClr val="0545E8"/>
+                </a:solidFill>
+              </a:rPr>
+              <a:t>优(A)     功能机器OK｜人工待确认（创新亮点（答辩评委判定）） ｜ 创新亮点加部署演示</a:t>
+            </a:r>
+          </a:p>
+          <a:p>
+            <a:r>
+              <a:rPr sz="1400" b="1">
+                <a:solidFill>
+                  <a:srgbClr val="0545E8"/>
+                </a:solidFill>
+              </a:rPr>
+              <a:t>人工答辩项 3 条，教师答辩时确认：D 档：预答辩评委放行（企业导师+组内互评 2/3 票，人工答辩确认）；B 档：评委评分≥85（答辩当天人工打分）；A 档：创新亮点（答辩评委判定）</a:t>
+            </a:r>
+          </a:p>
+          <a:p>
+            <a:r>
+              <a:rPr sz="1400" b="1">
+                <a:solidFill>
+                  <a:srgbClr val="0545E8"/>
+                </a:solidFill>
+              </a:rPr>
+              <a:t>证据链 5/5；可上台</a:t>
+            </a:r>
+          </a:p>
+          <a:p>
+            <a:r>
+              <a:rPr sz="1400" b="1">
+                <a:solidFill>
+                  <a:srgbClr val="0545E8"/>
+                </a:solidFill>
+              </a:rPr>
+              <a:t>工单里评委放行/评分≥85/创新亮点属人工答辩项，报告如实标注，不冒充实测</a:t>
             </a:r>
           </a:p>
         </p:txBody>
@@ -7608,7 +9691,7 @@
                 </a:solidFill>
                 <a:latin typeface="微软雅黑"/>
               </a:rPr>
-              <a:t>7 / 9</a:t>
+              <a:t>7 / 11</a:t>
             </a:r>
           </a:p>
         </p:txBody>
@@ -8223,7 +10306,7 @@
                 </a:solidFill>
                 <a:latin typeface="微软雅黑"/>
               </a:rPr>
-              <a:t>8 / 9</a:t>
+              <a:t>10 / 11</a:t>
             </a:r>
           </a:p>
         </p:txBody>
